--- a/低代码应用风险防控体系.pptx
+++ b/低代码应用风险防控体系.pptx
@@ -4832,7 +4832,7 @@
                 <a:latin typeface="Microsoft YaHei"/>
                 <a:ea typeface="Microsoft YaHei"/>
               </a:rPr>
-              <a:t>高风险敞口尚未完全收敛</a:t>
+              <a:t>高风险应用识别不够精准，难以有效捕捉真正的高风险应用</a:t>
             </a:r>
           </a:p>
           <a:p>
@@ -5181,7 +5181,7 @@
                 <a:latin typeface="Microsoft YaHei"/>
                 <a:ea typeface="Microsoft YaHei"/>
               </a:rPr>
-              <a:t>收敛高风险敞口</a:t>
+              <a:t>精准识别高风险应用</a:t>
             </a:r>
           </a:p>
           <a:p>
@@ -5211,7 +5211,7 @@
                 <a:latin typeface="Microsoft YaHei"/>
                 <a:ea typeface="Microsoft YaHei"/>
               </a:rPr>
-              <a:t>建立高风险应用清单与分级治理机制，开展重点风险专项清零，持续扩大治理覆盖面。</a:t>
+              <a:t>构建多维风险特征与分级评估模型，精准定位高风险应用，支撑重点治理与优先处置。</a:t>
             </a:r>
           </a:p>
           <a:p>
